--- a/Session 3/Slides/Session 3.pptx
+++ b/Session 3/Slides/Session 3.pptx
@@ -278,7 +278,7 @@
           <a:p>
             <a:fld id="{D55DA070-2934-4614-8D9D-0458B30AE12B}" type="datetimeFigureOut">
               <a:rPr lang="en-US" smtClean="0"/>
-              <a:t>12/2/2025</a:t>
+              <a:t>6/30/2026</a:t>
             </a:fld>
             <a:endParaRPr lang="en-US"/>
           </a:p>
@@ -476,7 +476,7 @@
           <a:p>
             <a:fld id="{D55DA070-2934-4614-8D9D-0458B30AE12B}" type="datetimeFigureOut">
               <a:rPr lang="en-US" smtClean="0"/>
-              <a:t>12/2/2025</a:t>
+              <a:t>6/30/2026</a:t>
             </a:fld>
             <a:endParaRPr lang="en-US"/>
           </a:p>
@@ -684,7 +684,7 @@
           <a:p>
             <a:fld id="{D55DA070-2934-4614-8D9D-0458B30AE12B}" type="datetimeFigureOut">
               <a:rPr lang="en-US" smtClean="0"/>
-              <a:t>12/2/2025</a:t>
+              <a:t>6/30/2026</a:t>
             </a:fld>
             <a:endParaRPr lang="en-US"/>
           </a:p>
@@ -882,7 +882,7 @@
           <a:p>
             <a:fld id="{D55DA070-2934-4614-8D9D-0458B30AE12B}" type="datetimeFigureOut">
               <a:rPr lang="en-US" smtClean="0"/>
-              <a:t>12/2/2025</a:t>
+              <a:t>6/30/2026</a:t>
             </a:fld>
             <a:endParaRPr lang="en-US"/>
           </a:p>
@@ -1157,7 +1157,7 @@
           <a:p>
             <a:fld id="{D55DA070-2934-4614-8D9D-0458B30AE12B}" type="datetimeFigureOut">
               <a:rPr lang="en-US" smtClean="0"/>
-              <a:t>12/2/2025</a:t>
+              <a:t>6/30/2026</a:t>
             </a:fld>
             <a:endParaRPr lang="en-US"/>
           </a:p>
@@ -1422,7 +1422,7 @@
           <a:p>
             <a:fld id="{D55DA070-2934-4614-8D9D-0458B30AE12B}" type="datetimeFigureOut">
               <a:rPr lang="en-US" smtClean="0"/>
-              <a:t>12/2/2025</a:t>
+              <a:t>6/30/2026</a:t>
             </a:fld>
             <a:endParaRPr lang="en-US"/>
           </a:p>
@@ -1834,7 +1834,7 @@
           <a:p>
             <a:fld id="{D55DA070-2934-4614-8D9D-0458B30AE12B}" type="datetimeFigureOut">
               <a:rPr lang="en-US" smtClean="0"/>
-              <a:t>12/2/2025</a:t>
+              <a:t>6/30/2026</a:t>
             </a:fld>
             <a:endParaRPr lang="en-US"/>
           </a:p>
@@ -1975,7 +1975,7 @@
           <a:p>
             <a:fld id="{D55DA070-2934-4614-8D9D-0458B30AE12B}" type="datetimeFigureOut">
               <a:rPr lang="en-US" smtClean="0"/>
-              <a:t>12/2/2025</a:t>
+              <a:t>6/30/2026</a:t>
             </a:fld>
             <a:endParaRPr lang="en-US"/>
           </a:p>
@@ -2088,7 +2088,7 @@
           <a:p>
             <a:fld id="{D55DA070-2934-4614-8D9D-0458B30AE12B}" type="datetimeFigureOut">
               <a:rPr lang="en-US" smtClean="0"/>
-              <a:t>12/2/2025</a:t>
+              <a:t>6/30/2026</a:t>
             </a:fld>
             <a:endParaRPr lang="en-US"/>
           </a:p>
@@ -2399,7 +2399,7 @@
           <a:p>
             <a:fld id="{D55DA070-2934-4614-8D9D-0458B30AE12B}" type="datetimeFigureOut">
               <a:rPr lang="en-US" smtClean="0"/>
-              <a:t>12/2/2025</a:t>
+              <a:t>6/30/2026</a:t>
             </a:fld>
             <a:endParaRPr lang="en-US"/>
           </a:p>
@@ -2687,7 +2687,7 @@
           <a:p>
             <a:fld id="{D55DA070-2934-4614-8D9D-0458B30AE12B}" type="datetimeFigureOut">
               <a:rPr lang="en-US" smtClean="0"/>
-              <a:t>12/2/2025</a:t>
+              <a:t>6/30/2026</a:t>
             </a:fld>
             <a:endParaRPr lang="en-US"/>
           </a:p>
@@ -2764,9 +2764,18 @@
 <p:sldMaster xmlns:a="http://schemas.openxmlformats.org/drawingml/2006/main" xmlns:r="http://schemas.openxmlformats.org/officeDocument/2006/relationships" xmlns:p="http://schemas.openxmlformats.org/presentationml/2006/main">
   <p:cSld>
     <p:bg>
-      <p:bgRef idx="1001">
-        <a:schemeClr val="bg1"/>
-      </p:bgRef>
+      <p:bgPr>
+        <a:blipFill dpi="0" rotWithShape="1">
+          <a:blip r:embed="rId13">
+            <a:lum/>
+          </a:blip>
+          <a:srcRect/>
+          <a:stretch>
+            <a:fillRect/>
+          </a:stretch>
+        </a:blipFill>
+        <a:effectLst/>
+      </p:bgPr>
     </p:bg>
     <p:spTree>
       <p:nvGrpSpPr>
@@ -2928,7 +2937,7 @@
           <a:p>
             <a:fld id="{D55DA070-2934-4614-8D9D-0458B30AE12B}" type="datetimeFigureOut">
               <a:rPr lang="en-US" smtClean="0"/>
-              <a:t>12/2/2025</a:t>
+              <a:t>6/30/2026</a:t>
             </a:fld>
             <a:endParaRPr lang="en-US"/>
           </a:p>
@@ -3345,37 +3354,12 @@
           <a:chExt cx="0" cy="0"/>
         </a:xfrm>
       </p:grpSpPr>
-      <p:sp>
-        <p:nvSpPr>
-          <p:cNvPr id="3" name="Subtitle 2">
-            <a:extLst>
-              <a:ext uri="{FF2B5EF4-FFF2-40B4-BE49-F238E27FC236}">
-                <a16:creationId xmlns:a16="http://schemas.microsoft.com/office/drawing/2014/main" id="{5B36F87B-08F8-87ED-A688-565048A3614C}"/>
-              </a:ext>
-            </a:extLst>
-          </p:cNvPr>
-          <p:cNvSpPr>
-            <a:spLocks noGrp="1"/>
-          </p:cNvSpPr>
-          <p:nvPr>
-            <p:ph type="subTitle" idx="1"/>
-          </p:nvPr>
-        </p:nvSpPr>
-        <p:spPr/>
-        <p:txBody>
-          <a:bodyPr/>
-          <a:lstStyle/>
-          <a:p>
-            <a:endParaRPr lang="en-GB"/>
-          </a:p>
-        </p:txBody>
-      </p:sp>
       <p:pic>
         <p:nvPicPr>
-          <p:cNvPr id="5" name="Picture 4" descr="A picture containing screenshot, space, darkness, flight&#10;&#10;Description automatically generated">
-            <a:extLst>
-              <a:ext uri="{FF2B5EF4-FFF2-40B4-BE49-F238E27FC236}">
-                <a16:creationId xmlns:a16="http://schemas.microsoft.com/office/drawing/2014/main" id="{D85C521F-EF14-DF28-0AEB-D7544D24F7EF}"/>
+          <p:cNvPr id="11" name="Picture 10" descr="A red text on a black background&#10;&#10;Description automatically generated with medium confidence">
+            <a:extLst>
+              <a:ext uri="{FF2B5EF4-FFF2-40B4-BE49-F238E27FC236}">
+                <a16:creationId xmlns:a16="http://schemas.microsoft.com/office/drawing/2014/main" id="{8A1CCC7E-6F70-0C85-F260-EEC3D4193FCF}"/>
               </a:ext>
             </a:extLst>
           </p:cNvPr>
@@ -3398,8 +3382,8 @@
         </p:blipFill>
         <p:spPr>
           <a:xfrm>
-            <a:off x="-96253" y="-36094"/>
-            <a:ext cx="12304295" cy="6908842"/>
+            <a:off x="10154653" y="101060"/>
+            <a:ext cx="1913202" cy="1164224"/>
           </a:xfrm>
           <a:prstGeom prst="rect">
             <a:avLst/>
@@ -3408,10 +3392,10 @@
       </p:pic>
       <p:pic>
         <p:nvPicPr>
-          <p:cNvPr id="11" name="Picture 10" descr="A red text on a black background&#10;&#10;Description automatically generated with medium confidence">
-            <a:extLst>
-              <a:ext uri="{FF2B5EF4-FFF2-40B4-BE49-F238E27FC236}">
-                <a16:creationId xmlns:a16="http://schemas.microsoft.com/office/drawing/2014/main" id="{8A1CCC7E-6F70-0C85-F260-EEC3D4193FCF}"/>
+          <p:cNvPr id="8" name="Picture 7">
+            <a:extLst>
+              <a:ext uri="{FF2B5EF4-FFF2-40B4-BE49-F238E27FC236}">
+                <a16:creationId xmlns:a16="http://schemas.microsoft.com/office/drawing/2014/main" id="{96E040BF-C392-052B-5990-6368B148E871}"/>
               </a:ext>
             </a:extLst>
           </p:cNvPr>
@@ -3421,21 +3405,15 @@
           <p:nvPr/>
         </p:nvPicPr>
         <p:blipFill>
-          <a:blip r:embed="rId3" cstate="print">
-            <a:extLst>
-              <a:ext uri="{28A0092B-C50C-407E-A947-70E740481C1C}">
-                <a14:useLocalDpi xmlns:a14="http://schemas.microsoft.com/office/drawing/2010/main" val="0"/>
-              </a:ext>
-            </a:extLst>
-          </a:blip>
+          <a:blip r:embed="rId3"/>
           <a:stretch>
             <a:fillRect/>
           </a:stretch>
         </p:blipFill>
         <p:spPr>
           <a:xfrm>
-            <a:off x="10154653" y="101060"/>
-            <a:ext cx="1913202" cy="1164224"/>
+            <a:off x="825880" y="6276175"/>
+            <a:ext cx="473540" cy="473540"/>
           </a:xfrm>
           <a:prstGeom prst="rect">
             <a:avLst/>
@@ -3444,10 +3422,10 @@
       </p:pic>
       <p:pic>
         <p:nvPicPr>
-          <p:cNvPr id="8" name="Picture 7">
-            <a:extLst>
-              <a:ext uri="{FF2B5EF4-FFF2-40B4-BE49-F238E27FC236}">
-                <a16:creationId xmlns:a16="http://schemas.microsoft.com/office/drawing/2014/main" id="{96E040BF-C392-052B-5990-6368B148E871}"/>
+          <p:cNvPr id="12" name="Picture 11">
+            <a:extLst>
+              <a:ext uri="{FF2B5EF4-FFF2-40B4-BE49-F238E27FC236}">
+                <a16:creationId xmlns:a16="http://schemas.microsoft.com/office/drawing/2014/main" id="{82F6409B-D42C-4D7E-A008-5B653A2362C5}"/>
               </a:ext>
             </a:extLst>
           </p:cNvPr>
@@ -3464,8 +3442,8 @@
         </p:blipFill>
         <p:spPr>
           <a:xfrm>
-            <a:off x="1887764" y="6276175"/>
-            <a:ext cx="473540" cy="473540"/>
+            <a:off x="2100924" y="6276175"/>
+            <a:ext cx="473541" cy="480028"/>
           </a:xfrm>
           <a:prstGeom prst="rect">
             <a:avLst/>
@@ -3474,10 +3452,10 @@
       </p:pic>
       <p:pic>
         <p:nvPicPr>
-          <p:cNvPr id="12" name="Picture 11">
-            <a:extLst>
-              <a:ext uri="{FF2B5EF4-FFF2-40B4-BE49-F238E27FC236}">
-                <a16:creationId xmlns:a16="http://schemas.microsoft.com/office/drawing/2014/main" id="{82F6409B-D42C-4D7E-A008-5B653A2362C5}"/>
+          <p:cNvPr id="2" name="Picture 1">
+            <a:extLst>
+              <a:ext uri="{FF2B5EF4-FFF2-40B4-BE49-F238E27FC236}">
+                <a16:creationId xmlns:a16="http://schemas.microsoft.com/office/drawing/2014/main" id="{D2DBE55D-89D5-EB2E-8EEB-5AFCDE69776B}"/>
               </a:ext>
             </a:extLst>
           </p:cNvPr>
@@ -3494,37 +3472,7 @@
         </p:blipFill>
         <p:spPr>
           <a:xfrm>
-            <a:off x="3162808" y="6276175"/>
-            <a:ext cx="473541" cy="480028"/>
-          </a:xfrm>
-          <a:prstGeom prst="rect">
-            <a:avLst/>
-          </a:prstGeom>
-        </p:spPr>
-      </p:pic>
-      <p:pic>
-        <p:nvPicPr>
-          <p:cNvPr id="2" name="Picture 1">
-            <a:extLst>
-              <a:ext uri="{FF2B5EF4-FFF2-40B4-BE49-F238E27FC236}">
-                <a16:creationId xmlns:a16="http://schemas.microsoft.com/office/drawing/2014/main" id="{D2DBE55D-89D5-EB2E-8EEB-5AFCDE69776B}"/>
-              </a:ext>
-            </a:extLst>
-          </p:cNvPr>
-          <p:cNvPicPr>
-            <a:picLocks noChangeAspect="1"/>
-          </p:cNvPicPr>
-          <p:nvPr/>
-        </p:nvPicPr>
-        <p:blipFill>
-          <a:blip r:embed="rId6"/>
-          <a:stretch>
-            <a:fillRect/>
-          </a:stretch>
-        </p:blipFill>
-        <p:spPr>
-          <a:xfrm>
-            <a:off x="2525286" y="6276175"/>
+            <a:off x="1463402" y="6276175"/>
             <a:ext cx="473540" cy="473540"/>
           </a:xfrm>
           <a:prstGeom prst="rect">
@@ -3547,7 +3495,7 @@
           <p:nvPr/>
         </p:nvPicPr>
         <p:blipFill>
-          <a:blip r:embed="rId7" cstate="print">
+          <a:blip r:embed="rId6" cstate="print">
             <a:extLst>
               <a:ext uri="{28A0092B-C50C-407E-A947-70E740481C1C}">
                 <a14:useLocalDpi xmlns:a14="http://schemas.microsoft.com/office/drawing/2010/main" val="0"/>
@@ -3677,10 +3625,10 @@
       </p:grpSpPr>
       <p:pic>
         <p:nvPicPr>
-          <p:cNvPr id="5" name="Picture 4" descr="A picture containing screenshot, darkness, space, blur">
-            <a:extLst>
-              <a:ext uri="{FF2B5EF4-FFF2-40B4-BE49-F238E27FC236}">
-                <a16:creationId xmlns:a16="http://schemas.microsoft.com/office/drawing/2014/main" id="{E5D0E97A-09A3-6E9F-3F23-5AC925C99099}"/>
+          <p:cNvPr id="6" name="Picture 5" descr="A logo with a star and wings&#10;&#10;Description automatically generated with low confidence">
+            <a:extLst>
+              <a:ext uri="{FF2B5EF4-FFF2-40B4-BE49-F238E27FC236}">
+                <a16:creationId xmlns:a16="http://schemas.microsoft.com/office/drawing/2014/main" id="{D1FCD02E-11C4-5D74-E876-475A9B9A82D5}"/>
               </a:ext>
             </a:extLst>
           </p:cNvPr>
@@ -3691,42 +3639,6 @@
         </p:nvPicPr>
         <p:blipFill>
           <a:blip r:embed="rId2" cstate="print">
-            <a:extLst>
-              <a:ext uri="{28A0092B-C50C-407E-A947-70E740481C1C}">
-                <a14:useLocalDpi xmlns:a14="http://schemas.microsoft.com/office/drawing/2010/main" val="0"/>
-              </a:ext>
-            </a:extLst>
-          </a:blip>
-          <a:stretch>
-            <a:fillRect/>
-          </a:stretch>
-        </p:blipFill>
-        <p:spPr>
-          <a:xfrm>
-            <a:off x="-64169" y="-64168"/>
-            <a:ext cx="12304295" cy="6978316"/>
-          </a:xfrm>
-          <a:prstGeom prst="rect">
-            <a:avLst/>
-          </a:prstGeom>
-        </p:spPr>
-      </p:pic>
-      <p:pic>
-        <p:nvPicPr>
-          <p:cNvPr id="6" name="Picture 5" descr="A logo with a star and wings&#10;&#10;Description automatically generated with low confidence">
-            <a:extLst>
-              <a:ext uri="{FF2B5EF4-FFF2-40B4-BE49-F238E27FC236}">
-                <a16:creationId xmlns:a16="http://schemas.microsoft.com/office/drawing/2014/main" id="{D1FCD02E-11C4-5D74-E876-475A9B9A82D5}"/>
-              </a:ext>
-            </a:extLst>
-          </p:cNvPr>
-          <p:cNvPicPr>
-            <a:picLocks noChangeAspect="1"/>
-          </p:cNvPicPr>
-          <p:nvPr/>
-        </p:nvPicPr>
-        <p:blipFill>
-          <a:blip r:embed="rId3" cstate="print">
             <a:extLst>
               <a:ext uri="{28A0092B-C50C-407E-A947-70E740481C1C}">
                 <a14:useLocalDpi xmlns:a14="http://schemas.microsoft.com/office/drawing/2010/main" val="0"/>
@@ -3881,7 +3793,7 @@
           <p:nvPr/>
         </p:nvPicPr>
         <p:blipFill>
-          <a:blip r:embed="rId4">
+          <a:blip r:embed="rId3">
             <a:extLst>
               <a:ext uri="{28A0092B-C50C-407E-A947-70E740481C1C}">
                 <a14:useLocalDpi xmlns:a14="http://schemas.microsoft.com/office/drawing/2010/main" val="0"/>
@@ -3982,10 +3894,10 @@
       </p:grpSpPr>
       <p:pic>
         <p:nvPicPr>
-          <p:cNvPr id="5" name="Picture 4" descr="A picture containing screenshot, darkness, space, blur">
-            <a:extLst>
-              <a:ext uri="{FF2B5EF4-FFF2-40B4-BE49-F238E27FC236}">
-                <a16:creationId xmlns:a16="http://schemas.microsoft.com/office/drawing/2014/main" id="{7DB43DE8-EE91-8D0B-73BD-2FA4E5877C4D}"/>
+          <p:cNvPr id="6" name="Picture 5" descr="A logo with a star and wings&#10;&#10;Description automatically generated with low confidence">
+            <a:extLst>
+              <a:ext uri="{FF2B5EF4-FFF2-40B4-BE49-F238E27FC236}">
+                <a16:creationId xmlns:a16="http://schemas.microsoft.com/office/drawing/2014/main" id="{9C05185C-8DCF-21B0-0EDE-148FFD57413E}"/>
               </a:ext>
             </a:extLst>
           </p:cNvPr>
@@ -3996,42 +3908,6 @@
         </p:nvPicPr>
         <p:blipFill>
           <a:blip r:embed="rId2" cstate="print">
-            <a:extLst>
-              <a:ext uri="{28A0092B-C50C-407E-A947-70E740481C1C}">
-                <a14:useLocalDpi xmlns:a14="http://schemas.microsoft.com/office/drawing/2010/main" val="0"/>
-              </a:ext>
-            </a:extLst>
-          </a:blip>
-          <a:stretch>
-            <a:fillRect/>
-          </a:stretch>
-        </p:blipFill>
-        <p:spPr>
-          <a:xfrm>
-            <a:off x="-64169" y="-64168"/>
-            <a:ext cx="12304295" cy="6978316"/>
-          </a:xfrm>
-          <a:prstGeom prst="rect">
-            <a:avLst/>
-          </a:prstGeom>
-        </p:spPr>
-      </p:pic>
-      <p:pic>
-        <p:nvPicPr>
-          <p:cNvPr id="6" name="Picture 5" descr="A logo with a star and wings&#10;&#10;Description automatically generated with low confidence">
-            <a:extLst>
-              <a:ext uri="{FF2B5EF4-FFF2-40B4-BE49-F238E27FC236}">
-                <a16:creationId xmlns:a16="http://schemas.microsoft.com/office/drawing/2014/main" id="{9C05185C-8DCF-21B0-0EDE-148FFD57413E}"/>
-              </a:ext>
-            </a:extLst>
-          </p:cNvPr>
-          <p:cNvPicPr>
-            <a:picLocks noChangeAspect="1"/>
-          </p:cNvPicPr>
-          <p:nvPr/>
-        </p:nvPicPr>
-        <p:blipFill>
-          <a:blip r:embed="rId3" cstate="print">
             <a:extLst>
               <a:ext uri="{28A0092B-C50C-407E-A947-70E740481C1C}">
                 <a14:useLocalDpi xmlns:a14="http://schemas.microsoft.com/office/drawing/2010/main" val="0"/>
@@ -4186,7 +4062,7 @@
           <p:nvPr/>
         </p:nvPicPr>
         <p:blipFill>
-          <a:blip r:embed="rId4"/>
+          <a:blip r:embed="rId3"/>
           <a:stretch>
             <a:fillRect/>
           </a:stretch>
@@ -4251,10 +4127,10 @@
       </p:grpSpPr>
       <p:pic>
         <p:nvPicPr>
-          <p:cNvPr id="5" name="Picture 4" descr="A picture containing screenshot, darkness, space, blur">
-            <a:extLst>
-              <a:ext uri="{FF2B5EF4-FFF2-40B4-BE49-F238E27FC236}">
-                <a16:creationId xmlns:a16="http://schemas.microsoft.com/office/drawing/2014/main" id="{AFE9EB21-A750-996B-69E4-E3C4C8FBA67A}"/>
+          <p:cNvPr id="6" name="Picture 5" descr="A logo with a star and wings&#10;&#10;Description automatically generated with low confidence">
+            <a:extLst>
+              <a:ext uri="{FF2B5EF4-FFF2-40B4-BE49-F238E27FC236}">
+                <a16:creationId xmlns:a16="http://schemas.microsoft.com/office/drawing/2014/main" id="{A5F7A0E6-4693-47FC-ADF0-82BA412A08D0}"/>
               </a:ext>
             </a:extLst>
           </p:cNvPr>
@@ -4265,42 +4141,6 @@
         </p:nvPicPr>
         <p:blipFill>
           <a:blip r:embed="rId2" cstate="print">
-            <a:extLst>
-              <a:ext uri="{28A0092B-C50C-407E-A947-70E740481C1C}">
-                <a14:useLocalDpi xmlns:a14="http://schemas.microsoft.com/office/drawing/2010/main" val="0"/>
-              </a:ext>
-            </a:extLst>
-          </a:blip>
-          <a:stretch>
-            <a:fillRect/>
-          </a:stretch>
-        </p:blipFill>
-        <p:spPr>
-          <a:xfrm>
-            <a:off x="-64169" y="-64168"/>
-            <a:ext cx="12304295" cy="6978316"/>
-          </a:xfrm>
-          <a:prstGeom prst="rect">
-            <a:avLst/>
-          </a:prstGeom>
-        </p:spPr>
-      </p:pic>
-      <p:pic>
-        <p:nvPicPr>
-          <p:cNvPr id="6" name="Picture 5" descr="A logo with a star and wings&#10;&#10;Description automatically generated with low confidence">
-            <a:extLst>
-              <a:ext uri="{FF2B5EF4-FFF2-40B4-BE49-F238E27FC236}">
-                <a16:creationId xmlns:a16="http://schemas.microsoft.com/office/drawing/2014/main" id="{A5F7A0E6-4693-47FC-ADF0-82BA412A08D0}"/>
-              </a:ext>
-            </a:extLst>
-          </p:cNvPr>
-          <p:cNvPicPr>
-            <a:picLocks noChangeAspect="1"/>
-          </p:cNvPicPr>
-          <p:nvPr/>
-        </p:nvPicPr>
-        <p:blipFill>
-          <a:blip r:embed="rId3" cstate="print">
             <a:extLst>
               <a:ext uri="{28A0092B-C50C-407E-A947-70E740481C1C}">
                 <a14:useLocalDpi xmlns:a14="http://schemas.microsoft.com/office/drawing/2010/main" val="0"/>
@@ -4376,7 +4216,7 @@
           <p:nvPr/>
         </p:nvPicPr>
         <p:blipFill>
-          <a:blip r:embed="rId4">
+          <a:blip r:embed="rId3">
             <a:extLst>
               <a:ext uri="{28A0092B-C50C-407E-A947-70E740481C1C}">
                 <a14:useLocalDpi xmlns:a14="http://schemas.microsoft.com/office/drawing/2010/main" val="0"/>
@@ -4488,10 +4328,10 @@
       </p:grpSpPr>
       <p:pic>
         <p:nvPicPr>
-          <p:cNvPr id="5" name="Picture 4" descr="A picture containing screenshot, darkness, space, blur">
-            <a:extLst>
-              <a:ext uri="{FF2B5EF4-FFF2-40B4-BE49-F238E27FC236}">
-                <a16:creationId xmlns:a16="http://schemas.microsoft.com/office/drawing/2014/main" id="{52145FC8-4430-D639-968C-353DEC59BCAF}"/>
+          <p:cNvPr id="6" name="Picture 5" descr="A logo with a star and wings&#10;&#10;Description automatically generated with low confidence">
+            <a:extLst>
+              <a:ext uri="{FF2B5EF4-FFF2-40B4-BE49-F238E27FC236}">
+                <a16:creationId xmlns:a16="http://schemas.microsoft.com/office/drawing/2014/main" id="{12147BE3-1C1E-71F7-E876-92251E6954BD}"/>
               </a:ext>
             </a:extLst>
           </p:cNvPr>
@@ -4502,42 +4342,6 @@
         </p:nvPicPr>
         <p:blipFill>
           <a:blip r:embed="rId2" cstate="print">
-            <a:extLst>
-              <a:ext uri="{28A0092B-C50C-407E-A947-70E740481C1C}">
-                <a14:useLocalDpi xmlns:a14="http://schemas.microsoft.com/office/drawing/2010/main" val="0"/>
-              </a:ext>
-            </a:extLst>
-          </a:blip>
-          <a:stretch>
-            <a:fillRect/>
-          </a:stretch>
-        </p:blipFill>
-        <p:spPr>
-          <a:xfrm>
-            <a:off x="-64169" y="-64168"/>
-            <a:ext cx="12304295" cy="6978316"/>
-          </a:xfrm>
-          <a:prstGeom prst="rect">
-            <a:avLst/>
-          </a:prstGeom>
-        </p:spPr>
-      </p:pic>
-      <p:pic>
-        <p:nvPicPr>
-          <p:cNvPr id="6" name="Picture 5" descr="A logo with a star and wings&#10;&#10;Description automatically generated with low confidence">
-            <a:extLst>
-              <a:ext uri="{FF2B5EF4-FFF2-40B4-BE49-F238E27FC236}">
-                <a16:creationId xmlns:a16="http://schemas.microsoft.com/office/drawing/2014/main" id="{12147BE3-1C1E-71F7-E876-92251E6954BD}"/>
-              </a:ext>
-            </a:extLst>
-          </p:cNvPr>
-          <p:cNvPicPr>
-            <a:picLocks noChangeAspect="1"/>
-          </p:cNvPicPr>
-          <p:nvPr/>
-        </p:nvPicPr>
-        <p:blipFill>
-          <a:blip r:embed="rId3" cstate="print">
             <a:extLst>
               <a:ext uri="{28A0092B-C50C-407E-A947-70E740481C1C}">
                 <a14:useLocalDpi xmlns:a14="http://schemas.microsoft.com/office/drawing/2010/main" val="0"/>
@@ -4613,7 +4417,7 @@
           <p:nvPr/>
         </p:nvPicPr>
         <p:blipFill>
-          <a:blip r:embed="rId4">
+          <a:blip r:embed="rId3">
             <a:extLst>
               <a:ext uri="{28A0092B-C50C-407E-A947-70E740481C1C}">
                 <a14:useLocalDpi xmlns:a14="http://schemas.microsoft.com/office/drawing/2010/main" val="0"/>
@@ -4690,10 +4494,10 @@
       </p:grpSpPr>
       <p:pic>
         <p:nvPicPr>
-          <p:cNvPr id="5" name="Picture 4" descr="A picture containing screenshot, darkness, space, blur">
-            <a:extLst>
-              <a:ext uri="{FF2B5EF4-FFF2-40B4-BE49-F238E27FC236}">
-                <a16:creationId xmlns:a16="http://schemas.microsoft.com/office/drawing/2014/main" id="{34480B3C-B2B8-CFB5-AB53-F07C7E452DD0}"/>
+          <p:cNvPr id="6" name="Picture 5" descr="A logo with a star and wings&#10;&#10;Description automatically generated with low confidence">
+            <a:extLst>
+              <a:ext uri="{FF2B5EF4-FFF2-40B4-BE49-F238E27FC236}">
+                <a16:creationId xmlns:a16="http://schemas.microsoft.com/office/drawing/2014/main" id="{8F5867D0-561A-1418-584A-4C496BAA58C5}"/>
               </a:ext>
             </a:extLst>
           </p:cNvPr>
@@ -4704,42 +4508,6 @@
         </p:nvPicPr>
         <p:blipFill>
           <a:blip r:embed="rId2" cstate="print">
-            <a:extLst>
-              <a:ext uri="{28A0092B-C50C-407E-A947-70E740481C1C}">
-                <a14:useLocalDpi xmlns:a14="http://schemas.microsoft.com/office/drawing/2010/main" val="0"/>
-              </a:ext>
-            </a:extLst>
-          </a:blip>
-          <a:stretch>
-            <a:fillRect/>
-          </a:stretch>
-        </p:blipFill>
-        <p:spPr>
-          <a:xfrm>
-            <a:off x="-64169" y="-64168"/>
-            <a:ext cx="12304295" cy="6978316"/>
-          </a:xfrm>
-          <a:prstGeom prst="rect">
-            <a:avLst/>
-          </a:prstGeom>
-        </p:spPr>
-      </p:pic>
-      <p:pic>
-        <p:nvPicPr>
-          <p:cNvPr id="6" name="Picture 5" descr="A logo with a star and wings&#10;&#10;Description automatically generated with low confidence">
-            <a:extLst>
-              <a:ext uri="{FF2B5EF4-FFF2-40B4-BE49-F238E27FC236}">
-                <a16:creationId xmlns:a16="http://schemas.microsoft.com/office/drawing/2014/main" id="{8F5867D0-561A-1418-584A-4C496BAA58C5}"/>
-              </a:ext>
-            </a:extLst>
-          </p:cNvPr>
-          <p:cNvPicPr>
-            <a:picLocks noChangeAspect="1"/>
-          </p:cNvPicPr>
-          <p:nvPr/>
-        </p:nvPicPr>
-        <p:blipFill>
-          <a:blip r:embed="rId3" cstate="print">
             <a:extLst>
               <a:ext uri="{28A0092B-C50C-407E-A947-70E740481C1C}">
                 <a14:useLocalDpi xmlns:a14="http://schemas.microsoft.com/office/drawing/2010/main" val="0"/>
@@ -4894,7 +4662,7 @@
           <p:nvPr/>
         </p:nvPicPr>
         <p:blipFill>
-          <a:blip r:embed="rId4">
+          <a:blip r:embed="rId3">
             <a:extLst>
               <a:ext uri="{28A0092B-C50C-407E-A947-70E740481C1C}">
                 <a14:useLocalDpi xmlns:a14="http://schemas.microsoft.com/office/drawing/2010/main" val="0"/>
@@ -4971,10 +4739,10 @@
       </p:grpSpPr>
       <p:pic>
         <p:nvPicPr>
-          <p:cNvPr id="5" name="Picture 4" descr="A picture containing screenshot, darkness, space, blur">
-            <a:extLst>
-              <a:ext uri="{FF2B5EF4-FFF2-40B4-BE49-F238E27FC236}">
-                <a16:creationId xmlns:a16="http://schemas.microsoft.com/office/drawing/2014/main" id="{D4401CCC-E99C-BB93-E7E7-D02DCF15527F}"/>
+          <p:cNvPr id="6" name="Picture 5" descr="A logo with a star and wings&#10;&#10;Description automatically generated with low confidence">
+            <a:extLst>
+              <a:ext uri="{FF2B5EF4-FFF2-40B4-BE49-F238E27FC236}">
+                <a16:creationId xmlns:a16="http://schemas.microsoft.com/office/drawing/2014/main" id="{CAF85476-D6FB-4E9E-ED64-AD5AA2309D5B}"/>
               </a:ext>
             </a:extLst>
           </p:cNvPr>
@@ -4985,42 +4753,6 @@
         </p:nvPicPr>
         <p:blipFill>
           <a:blip r:embed="rId2" cstate="print">
-            <a:extLst>
-              <a:ext uri="{28A0092B-C50C-407E-A947-70E740481C1C}">
-                <a14:useLocalDpi xmlns:a14="http://schemas.microsoft.com/office/drawing/2010/main" val="0"/>
-              </a:ext>
-            </a:extLst>
-          </a:blip>
-          <a:stretch>
-            <a:fillRect/>
-          </a:stretch>
-        </p:blipFill>
-        <p:spPr>
-          <a:xfrm>
-            <a:off x="-64169" y="-64168"/>
-            <a:ext cx="12304295" cy="6978316"/>
-          </a:xfrm>
-          <a:prstGeom prst="rect">
-            <a:avLst/>
-          </a:prstGeom>
-        </p:spPr>
-      </p:pic>
-      <p:pic>
-        <p:nvPicPr>
-          <p:cNvPr id="6" name="Picture 5" descr="A logo with a star and wings&#10;&#10;Description automatically generated with low confidence">
-            <a:extLst>
-              <a:ext uri="{FF2B5EF4-FFF2-40B4-BE49-F238E27FC236}">
-                <a16:creationId xmlns:a16="http://schemas.microsoft.com/office/drawing/2014/main" id="{CAF85476-D6FB-4E9E-ED64-AD5AA2309D5B}"/>
-              </a:ext>
-            </a:extLst>
-          </p:cNvPr>
-          <p:cNvPicPr>
-            <a:picLocks noChangeAspect="1"/>
-          </p:cNvPicPr>
-          <p:nvPr/>
-        </p:nvPicPr>
-        <p:blipFill>
-          <a:blip r:embed="rId3" cstate="print">
             <a:extLst>
               <a:ext uri="{28A0092B-C50C-407E-A947-70E740481C1C}">
                 <a14:useLocalDpi xmlns:a14="http://schemas.microsoft.com/office/drawing/2010/main" val="0"/>
@@ -5294,10 +5026,10 @@
       </p:grpSpPr>
       <p:pic>
         <p:nvPicPr>
-          <p:cNvPr id="5" name="Picture 4" descr="A picture containing screenshot, darkness, space, blur">
-            <a:extLst>
-              <a:ext uri="{FF2B5EF4-FFF2-40B4-BE49-F238E27FC236}">
-                <a16:creationId xmlns:a16="http://schemas.microsoft.com/office/drawing/2014/main" id="{1E51562F-3F82-DE6F-9014-A20382D3F570}"/>
+          <p:cNvPr id="6" name="Picture 5" descr="A logo with a star and wings&#10;&#10;Description automatically generated with low confidence">
+            <a:extLst>
+              <a:ext uri="{FF2B5EF4-FFF2-40B4-BE49-F238E27FC236}">
+                <a16:creationId xmlns:a16="http://schemas.microsoft.com/office/drawing/2014/main" id="{A45896CF-575B-E0E9-DD75-7C14FE80C349}"/>
               </a:ext>
             </a:extLst>
           </p:cNvPr>
@@ -5308,42 +5040,6 @@
         </p:nvPicPr>
         <p:blipFill>
           <a:blip r:embed="rId2" cstate="print">
-            <a:extLst>
-              <a:ext uri="{28A0092B-C50C-407E-A947-70E740481C1C}">
-                <a14:useLocalDpi xmlns:a14="http://schemas.microsoft.com/office/drawing/2010/main" val="0"/>
-              </a:ext>
-            </a:extLst>
-          </a:blip>
-          <a:stretch>
-            <a:fillRect/>
-          </a:stretch>
-        </p:blipFill>
-        <p:spPr>
-          <a:xfrm>
-            <a:off x="-64169" y="-64168"/>
-            <a:ext cx="12304295" cy="6978316"/>
-          </a:xfrm>
-          <a:prstGeom prst="rect">
-            <a:avLst/>
-          </a:prstGeom>
-        </p:spPr>
-      </p:pic>
-      <p:pic>
-        <p:nvPicPr>
-          <p:cNvPr id="6" name="Picture 5" descr="A logo with a star and wings&#10;&#10;Description automatically generated with low confidence">
-            <a:extLst>
-              <a:ext uri="{FF2B5EF4-FFF2-40B4-BE49-F238E27FC236}">
-                <a16:creationId xmlns:a16="http://schemas.microsoft.com/office/drawing/2014/main" id="{A45896CF-575B-E0E9-DD75-7C14FE80C349}"/>
-              </a:ext>
-            </a:extLst>
-          </p:cNvPr>
-          <p:cNvPicPr>
-            <a:picLocks noChangeAspect="1"/>
-          </p:cNvPicPr>
-          <p:nvPr/>
-        </p:nvPicPr>
-        <p:blipFill>
-          <a:blip r:embed="rId3" cstate="print">
             <a:extLst>
               <a:ext uri="{28A0092B-C50C-407E-A947-70E740481C1C}">
                 <a14:useLocalDpi xmlns:a14="http://schemas.microsoft.com/office/drawing/2010/main" val="0"/>
@@ -5615,10 +5311,10 @@
       </p:grpSpPr>
       <p:pic>
         <p:nvPicPr>
-          <p:cNvPr id="5" name="Picture 4" descr="A picture containing screenshot, darkness, space, blur">
-            <a:extLst>
-              <a:ext uri="{FF2B5EF4-FFF2-40B4-BE49-F238E27FC236}">
-                <a16:creationId xmlns:a16="http://schemas.microsoft.com/office/drawing/2014/main" id="{524BB5CC-53E6-9814-764C-1A098BE290EB}"/>
+          <p:cNvPr id="6" name="Picture 5" descr="A logo with a star and wings&#10;&#10;Description automatically generated with low confidence">
+            <a:extLst>
+              <a:ext uri="{FF2B5EF4-FFF2-40B4-BE49-F238E27FC236}">
+                <a16:creationId xmlns:a16="http://schemas.microsoft.com/office/drawing/2014/main" id="{61162CD4-07A6-BD18-5A19-106C6B81B5BB}"/>
               </a:ext>
             </a:extLst>
           </p:cNvPr>
@@ -5629,42 +5325,6 @@
         </p:nvPicPr>
         <p:blipFill>
           <a:blip r:embed="rId2" cstate="print">
-            <a:extLst>
-              <a:ext uri="{28A0092B-C50C-407E-A947-70E740481C1C}">
-                <a14:useLocalDpi xmlns:a14="http://schemas.microsoft.com/office/drawing/2010/main" val="0"/>
-              </a:ext>
-            </a:extLst>
-          </a:blip>
-          <a:stretch>
-            <a:fillRect/>
-          </a:stretch>
-        </p:blipFill>
-        <p:spPr>
-          <a:xfrm>
-            <a:off x="-64169" y="-64168"/>
-            <a:ext cx="12304295" cy="6978316"/>
-          </a:xfrm>
-          <a:prstGeom prst="rect">
-            <a:avLst/>
-          </a:prstGeom>
-        </p:spPr>
-      </p:pic>
-      <p:pic>
-        <p:nvPicPr>
-          <p:cNvPr id="6" name="Picture 5" descr="A logo with a star and wings&#10;&#10;Description automatically generated with low confidence">
-            <a:extLst>
-              <a:ext uri="{FF2B5EF4-FFF2-40B4-BE49-F238E27FC236}">
-                <a16:creationId xmlns:a16="http://schemas.microsoft.com/office/drawing/2014/main" id="{61162CD4-07A6-BD18-5A19-106C6B81B5BB}"/>
-              </a:ext>
-            </a:extLst>
-          </p:cNvPr>
-          <p:cNvPicPr>
-            <a:picLocks noChangeAspect="1"/>
-          </p:cNvPicPr>
-          <p:nvPr/>
-        </p:nvPicPr>
-        <p:blipFill>
-          <a:blip r:embed="rId3" cstate="print">
             <a:extLst>
               <a:ext uri="{28A0092B-C50C-407E-A947-70E740481C1C}">
                 <a14:useLocalDpi xmlns:a14="http://schemas.microsoft.com/office/drawing/2010/main" val="0"/>
@@ -5941,10 +5601,10 @@
       </p:grpSpPr>
       <p:pic>
         <p:nvPicPr>
-          <p:cNvPr id="5" name="Picture 4" descr="A picture containing screenshot, darkness, space, blur">
-            <a:extLst>
-              <a:ext uri="{FF2B5EF4-FFF2-40B4-BE49-F238E27FC236}">
-                <a16:creationId xmlns:a16="http://schemas.microsoft.com/office/drawing/2014/main" id="{020CD5CB-BB1C-00A1-E842-2D35BD6A79C3}"/>
+          <p:cNvPr id="6" name="Picture 5" descr="A logo with a star and wings&#10;&#10;Description automatically generated with low confidence">
+            <a:extLst>
+              <a:ext uri="{FF2B5EF4-FFF2-40B4-BE49-F238E27FC236}">
+                <a16:creationId xmlns:a16="http://schemas.microsoft.com/office/drawing/2014/main" id="{ADDBCE71-14F3-247E-18CF-784640C4B70D}"/>
               </a:ext>
             </a:extLst>
           </p:cNvPr>
@@ -5955,42 +5615,6 @@
         </p:nvPicPr>
         <p:blipFill>
           <a:blip r:embed="rId2" cstate="print">
-            <a:extLst>
-              <a:ext uri="{28A0092B-C50C-407E-A947-70E740481C1C}">
-                <a14:useLocalDpi xmlns:a14="http://schemas.microsoft.com/office/drawing/2010/main" val="0"/>
-              </a:ext>
-            </a:extLst>
-          </a:blip>
-          <a:stretch>
-            <a:fillRect/>
-          </a:stretch>
-        </p:blipFill>
-        <p:spPr>
-          <a:xfrm>
-            <a:off x="-64169" y="-64168"/>
-            <a:ext cx="12304295" cy="6978316"/>
-          </a:xfrm>
-          <a:prstGeom prst="rect">
-            <a:avLst/>
-          </a:prstGeom>
-        </p:spPr>
-      </p:pic>
-      <p:pic>
-        <p:nvPicPr>
-          <p:cNvPr id="6" name="Picture 5" descr="A logo with a star and wings&#10;&#10;Description automatically generated with low confidence">
-            <a:extLst>
-              <a:ext uri="{FF2B5EF4-FFF2-40B4-BE49-F238E27FC236}">
-                <a16:creationId xmlns:a16="http://schemas.microsoft.com/office/drawing/2014/main" id="{ADDBCE71-14F3-247E-18CF-784640C4B70D}"/>
-              </a:ext>
-            </a:extLst>
-          </p:cNvPr>
-          <p:cNvPicPr>
-            <a:picLocks noChangeAspect="1"/>
-          </p:cNvPicPr>
-          <p:nvPr/>
-        </p:nvPicPr>
-        <p:blipFill>
-          <a:blip r:embed="rId3" cstate="print">
             <a:extLst>
               <a:ext uri="{28A0092B-C50C-407E-A947-70E740481C1C}">
                 <a14:useLocalDpi xmlns:a14="http://schemas.microsoft.com/office/drawing/2010/main" val="0"/>
@@ -6066,7 +5690,7 @@
           <p:nvPr/>
         </p:nvPicPr>
         <p:blipFill>
-          <a:blip r:embed="rId4">
+          <a:blip r:embed="rId3">
             <a:extLst>
               <a:ext uri="{28A0092B-C50C-407E-A947-70E740481C1C}">
                 <a14:useLocalDpi xmlns:a14="http://schemas.microsoft.com/office/drawing/2010/main" val="0"/>
@@ -6178,10 +5802,10 @@
       </p:grpSpPr>
       <p:pic>
         <p:nvPicPr>
-          <p:cNvPr id="5" name="Picture 4" descr="A picture containing screenshot, darkness, space, blur">
-            <a:extLst>
-              <a:ext uri="{FF2B5EF4-FFF2-40B4-BE49-F238E27FC236}">
-                <a16:creationId xmlns:a16="http://schemas.microsoft.com/office/drawing/2014/main" id="{418CCC79-8A7B-1592-A703-5644814F0D18}"/>
+          <p:cNvPr id="6" name="Picture 5" descr="A logo with a star and wings&#10;&#10;Description automatically generated with low confidence">
+            <a:extLst>
+              <a:ext uri="{FF2B5EF4-FFF2-40B4-BE49-F238E27FC236}">
+                <a16:creationId xmlns:a16="http://schemas.microsoft.com/office/drawing/2014/main" id="{C59219C0-BBF1-8E36-881E-B4AC0010F9CC}"/>
               </a:ext>
             </a:extLst>
           </p:cNvPr>
@@ -6192,42 +5816,6 @@
         </p:nvPicPr>
         <p:blipFill>
           <a:blip r:embed="rId2" cstate="print">
-            <a:extLst>
-              <a:ext uri="{28A0092B-C50C-407E-A947-70E740481C1C}">
-                <a14:useLocalDpi xmlns:a14="http://schemas.microsoft.com/office/drawing/2010/main" val="0"/>
-              </a:ext>
-            </a:extLst>
-          </a:blip>
-          <a:stretch>
-            <a:fillRect/>
-          </a:stretch>
-        </p:blipFill>
-        <p:spPr>
-          <a:xfrm>
-            <a:off x="-64169" y="-64168"/>
-            <a:ext cx="12304295" cy="6978316"/>
-          </a:xfrm>
-          <a:prstGeom prst="rect">
-            <a:avLst/>
-          </a:prstGeom>
-        </p:spPr>
-      </p:pic>
-      <p:pic>
-        <p:nvPicPr>
-          <p:cNvPr id="6" name="Picture 5" descr="A logo with a star and wings&#10;&#10;Description automatically generated with low confidence">
-            <a:extLst>
-              <a:ext uri="{FF2B5EF4-FFF2-40B4-BE49-F238E27FC236}">
-                <a16:creationId xmlns:a16="http://schemas.microsoft.com/office/drawing/2014/main" id="{C59219C0-BBF1-8E36-881E-B4AC0010F9CC}"/>
-              </a:ext>
-            </a:extLst>
-          </p:cNvPr>
-          <p:cNvPicPr>
-            <a:picLocks noChangeAspect="1"/>
-          </p:cNvPicPr>
-          <p:nvPr/>
-        </p:nvPicPr>
-        <p:blipFill>
-          <a:blip r:embed="rId3" cstate="print">
             <a:extLst>
               <a:ext uri="{28A0092B-C50C-407E-A947-70E740481C1C}">
                 <a14:useLocalDpi xmlns:a14="http://schemas.microsoft.com/office/drawing/2010/main" val="0"/>
@@ -6353,7 +5941,7 @@
           <p:nvPr/>
         </p:nvPicPr>
         <p:blipFill>
-          <a:blip r:embed="rId4">
+          <a:blip r:embed="rId3">
             <a:extLst>
               <a:ext uri="{28A0092B-C50C-407E-A947-70E740481C1C}">
                 <a14:useLocalDpi xmlns:a14="http://schemas.microsoft.com/office/drawing/2010/main" val="0"/>
@@ -6425,10 +6013,10 @@
       </p:grpSpPr>
       <p:pic>
         <p:nvPicPr>
-          <p:cNvPr id="5" name="Picture 4" descr="A picture containing screenshot, darkness, space, blur">
-            <a:extLst>
-              <a:ext uri="{FF2B5EF4-FFF2-40B4-BE49-F238E27FC236}">
-                <a16:creationId xmlns:a16="http://schemas.microsoft.com/office/drawing/2014/main" id="{4A58BABB-4D76-9397-40E5-A43422F6ACA5}"/>
+          <p:cNvPr id="6" name="Picture 5" descr="A logo with a star and wings&#10;&#10;Description automatically generated with low confidence">
+            <a:extLst>
+              <a:ext uri="{FF2B5EF4-FFF2-40B4-BE49-F238E27FC236}">
+                <a16:creationId xmlns:a16="http://schemas.microsoft.com/office/drawing/2014/main" id="{ACE80423-3437-84C2-6E7A-321813DDF0DF}"/>
               </a:ext>
             </a:extLst>
           </p:cNvPr>
@@ -6439,42 +6027,6 @@
         </p:nvPicPr>
         <p:blipFill>
           <a:blip r:embed="rId2" cstate="print">
-            <a:extLst>
-              <a:ext uri="{28A0092B-C50C-407E-A947-70E740481C1C}">
-                <a14:useLocalDpi xmlns:a14="http://schemas.microsoft.com/office/drawing/2010/main" val="0"/>
-              </a:ext>
-            </a:extLst>
-          </a:blip>
-          <a:stretch>
-            <a:fillRect/>
-          </a:stretch>
-        </p:blipFill>
-        <p:spPr>
-          <a:xfrm>
-            <a:off x="-64169" y="-64168"/>
-            <a:ext cx="12304295" cy="6978316"/>
-          </a:xfrm>
-          <a:prstGeom prst="rect">
-            <a:avLst/>
-          </a:prstGeom>
-        </p:spPr>
-      </p:pic>
-      <p:pic>
-        <p:nvPicPr>
-          <p:cNvPr id="6" name="Picture 5" descr="A logo with a star and wings&#10;&#10;Description automatically generated with low confidence">
-            <a:extLst>
-              <a:ext uri="{FF2B5EF4-FFF2-40B4-BE49-F238E27FC236}">
-                <a16:creationId xmlns:a16="http://schemas.microsoft.com/office/drawing/2014/main" id="{ACE80423-3437-84C2-6E7A-321813DDF0DF}"/>
-              </a:ext>
-            </a:extLst>
-          </p:cNvPr>
-          <p:cNvPicPr>
-            <a:picLocks noChangeAspect="1"/>
-          </p:cNvPicPr>
-          <p:nvPr/>
-        </p:nvPicPr>
-        <p:blipFill>
-          <a:blip r:embed="rId3" cstate="print">
             <a:extLst>
               <a:ext uri="{28A0092B-C50C-407E-A947-70E740481C1C}">
                 <a14:useLocalDpi xmlns:a14="http://schemas.microsoft.com/office/drawing/2010/main" val="0"/>
@@ -6643,10 +6195,10 @@
       </p:grpSpPr>
       <p:pic>
         <p:nvPicPr>
-          <p:cNvPr id="5" name="Picture 4" descr="A picture containing screenshot, darkness, space, blur">
-            <a:extLst>
-              <a:ext uri="{FF2B5EF4-FFF2-40B4-BE49-F238E27FC236}">
-                <a16:creationId xmlns:a16="http://schemas.microsoft.com/office/drawing/2014/main" id="{65B6A5DB-CD73-8E7B-54B1-068BD52030F2}"/>
+          <p:cNvPr id="6" name="Picture 5" descr="A logo with a star and wings&#10;&#10;Description automatically generated with low confidence">
+            <a:extLst>
+              <a:ext uri="{FF2B5EF4-FFF2-40B4-BE49-F238E27FC236}">
+                <a16:creationId xmlns:a16="http://schemas.microsoft.com/office/drawing/2014/main" id="{709224E7-DC9F-52B0-7643-14EACF5D714F}"/>
               </a:ext>
             </a:extLst>
           </p:cNvPr>
@@ -6657,42 +6209,6 @@
         </p:nvPicPr>
         <p:blipFill>
           <a:blip r:embed="rId2" cstate="print">
-            <a:extLst>
-              <a:ext uri="{28A0092B-C50C-407E-A947-70E740481C1C}">
-                <a14:useLocalDpi xmlns:a14="http://schemas.microsoft.com/office/drawing/2010/main" val="0"/>
-              </a:ext>
-            </a:extLst>
-          </a:blip>
-          <a:stretch>
-            <a:fillRect/>
-          </a:stretch>
-        </p:blipFill>
-        <p:spPr>
-          <a:xfrm>
-            <a:off x="-64169" y="-64168"/>
-            <a:ext cx="12304295" cy="6978316"/>
-          </a:xfrm>
-          <a:prstGeom prst="rect">
-            <a:avLst/>
-          </a:prstGeom>
-        </p:spPr>
-      </p:pic>
-      <p:pic>
-        <p:nvPicPr>
-          <p:cNvPr id="6" name="Picture 5" descr="A logo with a star and wings&#10;&#10;Description automatically generated with low confidence">
-            <a:extLst>
-              <a:ext uri="{FF2B5EF4-FFF2-40B4-BE49-F238E27FC236}">
-                <a16:creationId xmlns:a16="http://schemas.microsoft.com/office/drawing/2014/main" id="{709224E7-DC9F-52B0-7643-14EACF5D714F}"/>
-              </a:ext>
-            </a:extLst>
-          </p:cNvPr>
-          <p:cNvPicPr>
-            <a:picLocks noChangeAspect="1"/>
-          </p:cNvPicPr>
-          <p:nvPr/>
-        </p:nvPicPr>
-        <p:blipFill>
-          <a:blip r:embed="rId3" cstate="print">
             <a:extLst>
               <a:ext uri="{28A0092B-C50C-407E-A947-70E740481C1C}">
                 <a14:useLocalDpi xmlns:a14="http://schemas.microsoft.com/office/drawing/2010/main" val="0"/>
@@ -6821,10 +6337,10 @@
       </p:grpSpPr>
       <p:pic>
         <p:nvPicPr>
-          <p:cNvPr id="5" name="Picture 4" descr="A picture containing screenshot, darkness, space, blur">
-            <a:extLst>
-              <a:ext uri="{FF2B5EF4-FFF2-40B4-BE49-F238E27FC236}">
-                <a16:creationId xmlns:a16="http://schemas.microsoft.com/office/drawing/2014/main" id="{E9BEF2D8-8A81-6189-2944-388146991524}"/>
+          <p:cNvPr id="6" name="Picture 5" descr="A logo with a star and wings&#10;&#10;Description automatically generated with low confidence">
+            <a:extLst>
+              <a:ext uri="{FF2B5EF4-FFF2-40B4-BE49-F238E27FC236}">
+                <a16:creationId xmlns:a16="http://schemas.microsoft.com/office/drawing/2014/main" id="{35D0656A-D9EC-6E0B-930A-CF52EF5581D7}"/>
               </a:ext>
             </a:extLst>
           </p:cNvPr>
@@ -6847,42 +6363,6 @@
         </p:blipFill>
         <p:spPr>
           <a:xfrm>
-            <a:off x="-64169" y="-64168"/>
-            <a:ext cx="12304295" cy="6978316"/>
-          </a:xfrm>
-          <a:prstGeom prst="rect">
-            <a:avLst/>
-          </a:prstGeom>
-        </p:spPr>
-      </p:pic>
-      <p:pic>
-        <p:nvPicPr>
-          <p:cNvPr id="6" name="Picture 5" descr="A logo with a star and wings&#10;&#10;Description automatically generated with low confidence">
-            <a:extLst>
-              <a:ext uri="{FF2B5EF4-FFF2-40B4-BE49-F238E27FC236}">
-                <a16:creationId xmlns:a16="http://schemas.microsoft.com/office/drawing/2014/main" id="{35D0656A-D9EC-6E0B-930A-CF52EF5581D7}"/>
-              </a:ext>
-            </a:extLst>
-          </p:cNvPr>
-          <p:cNvPicPr>
-            <a:picLocks noChangeAspect="1"/>
-          </p:cNvPicPr>
-          <p:nvPr/>
-        </p:nvPicPr>
-        <p:blipFill>
-          <a:blip r:embed="rId3" cstate="print">
-            <a:extLst>
-              <a:ext uri="{28A0092B-C50C-407E-A947-70E740481C1C}">
-                <a14:useLocalDpi xmlns:a14="http://schemas.microsoft.com/office/drawing/2010/main" val="0"/>
-              </a:ext>
-            </a:extLst>
-          </a:blip>
-          <a:stretch>
-            <a:fillRect/>
-          </a:stretch>
-        </p:blipFill>
-        <p:spPr>
-          <a:xfrm>
             <a:off x="5369985" y="6050010"/>
             <a:ext cx="1452029" cy="677399"/>
           </a:xfrm>
@@ -6906,7 +6386,7 @@
           <p:nvPr/>
         </p:nvPicPr>
         <p:blipFill>
-          <a:blip r:embed="rId4">
+          <a:blip r:embed="rId3">
             <a:extLst>
               <a:ext uri="{28A0092B-C50C-407E-A947-70E740481C1C}">
                 <a14:useLocalDpi xmlns:a14="http://schemas.microsoft.com/office/drawing/2010/main" val="0"/>
@@ -7018,10 +6498,10 @@
       </p:grpSpPr>
       <p:pic>
         <p:nvPicPr>
-          <p:cNvPr id="5" name="Picture 4" descr="A picture containing screenshot, darkness, space, blur">
-            <a:extLst>
-              <a:ext uri="{FF2B5EF4-FFF2-40B4-BE49-F238E27FC236}">
-                <a16:creationId xmlns:a16="http://schemas.microsoft.com/office/drawing/2014/main" id="{E9BEF2D8-8A81-6189-2944-388146991524}"/>
+          <p:cNvPr id="6" name="Picture 5" descr="A logo with a star and wings&#10;&#10;Description automatically generated with low confidence">
+            <a:extLst>
+              <a:ext uri="{FF2B5EF4-FFF2-40B4-BE49-F238E27FC236}">
+                <a16:creationId xmlns:a16="http://schemas.microsoft.com/office/drawing/2014/main" id="{35D0656A-D9EC-6E0B-930A-CF52EF5581D7}"/>
               </a:ext>
             </a:extLst>
           </p:cNvPr>
@@ -7032,42 +6512,6 @@
         </p:nvPicPr>
         <p:blipFill>
           <a:blip r:embed="rId2" cstate="print">
-            <a:extLst>
-              <a:ext uri="{28A0092B-C50C-407E-A947-70E740481C1C}">
-                <a14:useLocalDpi xmlns:a14="http://schemas.microsoft.com/office/drawing/2010/main" val="0"/>
-              </a:ext>
-            </a:extLst>
-          </a:blip>
-          <a:stretch>
-            <a:fillRect/>
-          </a:stretch>
-        </p:blipFill>
-        <p:spPr>
-          <a:xfrm>
-            <a:off x="-64169" y="-64168"/>
-            <a:ext cx="12304295" cy="6978316"/>
-          </a:xfrm>
-          <a:prstGeom prst="rect">
-            <a:avLst/>
-          </a:prstGeom>
-        </p:spPr>
-      </p:pic>
-      <p:pic>
-        <p:nvPicPr>
-          <p:cNvPr id="6" name="Picture 5" descr="A logo with a star and wings&#10;&#10;Description automatically generated with low confidence">
-            <a:extLst>
-              <a:ext uri="{FF2B5EF4-FFF2-40B4-BE49-F238E27FC236}">
-                <a16:creationId xmlns:a16="http://schemas.microsoft.com/office/drawing/2014/main" id="{35D0656A-D9EC-6E0B-930A-CF52EF5581D7}"/>
-              </a:ext>
-            </a:extLst>
-          </p:cNvPr>
-          <p:cNvPicPr>
-            <a:picLocks noChangeAspect="1"/>
-          </p:cNvPicPr>
-          <p:nvPr/>
-        </p:nvPicPr>
-        <p:blipFill>
-          <a:blip r:embed="rId3" cstate="print">
             <a:extLst>
               <a:ext uri="{28A0092B-C50C-407E-A947-70E740481C1C}">
                 <a14:useLocalDpi xmlns:a14="http://schemas.microsoft.com/office/drawing/2010/main" val="0"/>
@@ -7143,7 +6587,7 @@
           <p:nvPr/>
         </p:nvPicPr>
         <p:blipFill>
-          <a:blip r:embed="rId4">
+          <a:blip r:embed="rId3">
             <a:extLst>
               <a:ext uri="{28A0092B-C50C-407E-A947-70E740481C1C}">
                 <a14:useLocalDpi xmlns:a14="http://schemas.microsoft.com/office/drawing/2010/main" val="0"/>
@@ -7221,10 +6665,10 @@
       </p:grpSpPr>
       <p:pic>
         <p:nvPicPr>
-          <p:cNvPr id="5" name="Picture 4" descr="A picture containing screenshot, darkness, space, blur">
-            <a:extLst>
-              <a:ext uri="{FF2B5EF4-FFF2-40B4-BE49-F238E27FC236}">
-                <a16:creationId xmlns:a16="http://schemas.microsoft.com/office/drawing/2014/main" id="{AE8E2E00-7DAC-21CB-185D-DE0468BDE1BF}"/>
+          <p:cNvPr id="6" name="Picture 5" descr="A logo with a star and wings&#10;&#10;Description automatically generated with low confidence">
+            <a:extLst>
+              <a:ext uri="{FF2B5EF4-FFF2-40B4-BE49-F238E27FC236}">
+                <a16:creationId xmlns:a16="http://schemas.microsoft.com/office/drawing/2014/main" id="{1C9769AD-75E1-89C8-CF2D-8CF8385B9711}"/>
               </a:ext>
             </a:extLst>
           </p:cNvPr>
@@ -7235,42 +6679,6 @@
         </p:nvPicPr>
         <p:blipFill>
           <a:blip r:embed="rId2" cstate="print">
-            <a:extLst>
-              <a:ext uri="{28A0092B-C50C-407E-A947-70E740481C1C}">
-                <a14:useLocalDpi xmlns:a14="http://schemas.microsoft.com/office/drawing/2010/main" val="0"/>
-              </a:ext>
-            </a:extLst>
-          </a:blip>
-          <a:stretch>
-            <a:fillRect/>
-          </a:stretch>
-        </p:blipFill>
-        <p:spPr>
-          <a:xfrm>
-            <a:off x="-64169" y="-64168"/>
-            <a:ext cx="12304295" cy="6978316"/>
-          </a:xfrm>
-          <a:prstGeom prst="rect">
-            <a:avLst/>
-          </a:prstGeom>
-        </p:spPr>
-      </p:pic>
-      <p:pic>
-        <p:nvPicPr>
-          <p:cNvPr id="6" name="Picture 5" descr="A logo with a star and wings&#10;&#10;Description automatically generated with low confidence">
-            <a:extLst>
-              <a:ext uri="{FF2B5EF4-FFF2-40B4-BE49-F238E27FC236}">
-                <a16:creationId xmlns:a16="http://schemas.microsoft.com/office/drawing/2014/main" id="{1C9769AD-75E1-89C8-CF2D-8CF8385B9711}"/>
-              </a:ext>
-            </a:extLst>
-          </p:cNvPr>
-          <p:cNvPicPr>
-            <a:picLocks noChangeAspect="1"/>
-          </p:cNvPicPr>
-          <p:nvPr/>
-        </p:nvPicPr>
-        <p:blipFill>
-          <a:blip r:embed="rId3" cstate="print">
             <a:extLst>
               <a:ext uri="{28A0092B-C50C-407E-A947-70E740481C1C}">
                 <a14:useLocalDpi xmlns:a14="http://schemas.microsoft.com/office/drawing/2010/main" val="0"/>
@@ -7510,7 +6918,7 @@
           <p:nvPr/>
         </p:nvPicPr>
         <p:blipFill>
-          <a:blip r:embed="rId4"/>
+          <a:blip r:embed="rId3"/>
           <a:stretch>
             <a:fillRect/>
           </a:stretch>
@@ -7575,10 +6983,10 @@
       </p:grpSpPr>
       <p:pic>
         <p:nvPicPr>
-          <p:cNvPr id="5" name="Picture 4" descr="A picture containing screenshot, darkness, space, blur">
-            <a:extLst>
-              <a:ext uri="{FF2B5EF4-FFF2-40B4-BE49-F238E27FC236}">
-                <a16:creationId xmlns:a16="http://schemas.microsoft.com/office/drawing/2014/main" id="{D223D98A-8DAC-049A-F4EF-562D4C5845BD}"/>
+          <p:cNvPr id="6" name="Picture 5" descr="A logo with a star and wings&#10;&#10;Description automatically generated with low confidence">
+            <a:extLst>
+              <a:ext uri="{FF2B5EF4-FFF2-40B4-BE49-F238E27FC236}">
+                <a16:creationId xmlns:a16="http://schemas.microsoft.com/office/drawing/2014/main" id="{A5A828FC-325A-357F-103F-EBAAE67F1767}"/>
               </a:ext>
             </a:extLst>
           </p:cNvPr>
@@ -7589,42 +6997,6 @@
         </p:nvPicPr>
         <p:blipFill>
           <a:blip r:embed="rId2" cstate="print">
-            <a:extLst>
-              <a:ext uri="{28A0092B-C50C-407E-A947-70E740481C1C}">
-                <a14:useLocalDpi xmlns:a14="http://schemas.microsoft.com/office/drawing/2010/main" val="0"/>
-              </a:ext>
-            </a:extLst>
-          </a:blip>
-          <a:stretch>
-            <a:fillRect/>
-          </a:stretch>
-        </p:blipFill>
-        <p:spPr>
-          <a:xfrm>
-            <a:off x="-64169" y="-64168"/>
-            <a:ext cx="12304295" cy="6978316"/>
-          </a:xfrm>
-          <a:prstGeom prst="rect">
-            <a:avLst/>
-          </a:prstGeom>
-        </p:spPr>
-      </p:pic>
-      <p:pic>
-        <p:nvPicPr>
-          <p:cNvPr id="6" name="Picture 5" descr="A logo with a star and wings&#10;&#10;Description automatically generated with low confidence">
-            <a:extLst>
-              <a:ext uri="{FF2B5EF4-FFF2-40B4-BE49-F238E27FC236}">
-                <a16:creationId xmlns:a16="http://schemas.microsoft.com/office/drawing/2014/main" id="{A5A828FC-325A-357F-103F-EBAAE67F1767}"/>
-              </a:ext>
-            </a:extLst>
-          </p:cNvPr>
-          <p:cNvPicPr>
-            <a:picLocks noChangeAspect="1"/>
-          </p:cNvPicPr>
-          <p:nvPr/>
-        </p:nvPicPr>
-        <p:blipFill>
-          <a:blip r:embed="rId3" cstate="print">
             <a:extLst>
               <a:ext uri="{28A0092B-C50C-407E-A947-70E740481C1C}">
                 <a14:useLocalDpi xmlns:a14="http://schemas.microsoft.com/office/drawing/2010/main" val="0"/>
@@ -7818,7 +7190,7 @@
           <p:nvPr/>
         </p:nvPicPr>
         <p:blipFill>
-          <a:blip r:embed="rId4">
+          <a:blip r:embed="rId3">
             <a:extLst>
               <a:ext uri="{28A0092B-C50C-407E-A947-70E740481C1C}">
                 <a14:useLocalDpi xmlns:a14="http://schemas.microsoft.com/office/drawing/2010/main" val="0"/>
@@ -7889,10 +7261,10 @@
       </p:grpSpPr>
       <p:pic>
         <p:nvPicPr>
-          <p:cNvPr id="5" name="Picture 4" descr="A picture containing screenshot, darkness, space, blur">
-            <a:extLst>
-              <a:ext uri="{FF2B5EF4-FFF2-40B4-BE49-F238E27FC236}">
-                <a16:creationId xmlns:a16="http://schemas.microsoft.com/office/drawing/2014/main" id="{2F86D596-51A4-F2B0-6409-AB2923B37DEC}"/>
+          <p:cNvPr id="6" name="Picture 5" descr="A logo with a star and wings&#10;&#10;Description automatically generated with low confidence">
+            <a:extLst>
+              <a:ext uri="{FF2B5EF4-FFF2-40B4-BE49-F238E27FC236}">
+                <a16:creationId xmlns:a16="http://schemas.microsoft.com/office/drawing/2014/main" id="{BB7F09D9-B209-4D76-EF17-9C3D3478224E}"/>
               </a:ext>
             </a:extLst>
           </p:cNvPr>
@@ -7903,42 +7275,6 @@
         </p:nvPicPr>
         <p:blipFill>
           <a:blip r:embed="rId2" cstate="print">
-            <a:extLst>
-              <a:ext uri="{28A0092B-C50C-407E-A947-70E740481C1C}">
-                <a14:useLocalDpi xmlns:a14="http://schemas.microsoft.com/office/drawing/2010/main" val="0"/>
-              </a:ext>
-            </a:extLst>
-          </a:blip>
-          <a:stretch>
-            <a:fillRect/>
-          </a:stretch>
-        </p:blipFill>
-        <p:spPr>
-          <a:xfrm>
-            <a:off x="-64169" y="-64168"/>
-            <a:ext cx="12304295" cy="6978316"/>
-          </a:xfrm>
-          <a:prstGeom prst="rect">
-            <a:avLst/>
-          </a:prstGeom>
-        </p:spPr>
-      </p:pic>
-      <p:pic>
-        <p:nvPicPr>
-          <p:cNvPr id="6" name="Picture 5" descr="A logo with a star and wings&#10;&#10;Description automatically generated with low confidence">
-            <a:extLst>
-              <a:ext uri="{FF2B5EF4-FFF2-40B4-BE49-F238E27FC236}">
-                <a16:creationId xmlns:a16="http://schemas.microsoft.com/office/drawing/2014/main" id="{BB7F09D9-B209-4D76-EF17-9C3D3478224E}"/>
-              </a:ext>
-            </a:extLst>
-          </p:cNvPr>
-          <p:cNvPicPr>
-            <a:picLocks noChangeAspect="1"/>
-          </p:cNvPicPr>
-          <p:nvPr/>
-        </p:nvPicPr>
-        <p:blipFill>
-          <a:blip r:embed="rId3" cstate="print">
             <a:extLst>
               <a:ext uri="{28A0092B-C50C-407E-A947-70E740481C1C}">
                 <a14:useLocalDpi xmlns:a14="http://schemas.microsoft.com/office/drawing/2010/main" val="0"/>
@@ -8132,7 +7468,7 @@
           <p:nvPr/>
         </p:nvPicPr>
         <p:blipFill>
-          <a:blip r:embed="rId4">
+          <a:blip r:embed="rId3">
             <a:extLst>
               <a:ext uri="{28A0092B-C50C-407E-A947-70E740481C1C}">
                 <a14:useLocalDpi xmlns:a14="http://schemas.microsoft.com/office/drawing/2010/main" val="0"/>
@@ -8203,10 +7539,10 @@
       </p:grpSpPr>
       <p:pic>
         <p:nvPicPr>
-          <p:cNvPr id="5" name="Picture 4" descr="A picture containing screenshot, darkness, space, blur">
-            <a:extLst>
-              <a:ext uri="{FF2B5EF4-FFF2-40B4-BE49-F238E27FC236}">
-                <a16:creationId xmlns:a16="http://schemas.microsoft.com/office/drawing/2014/main" id="{0FA71C01-F8E3-E386-C0B0-BEBDB5C91A5B}"/>
+          <p:cNvPr id="6" name="Picture 5" descr="A logo with a star and wings&#10;&#10;Description automatically generated with low confidence">
+            <a:extLst>
+              <a:ext uri="{FF2B5EF4-FFF2-40B4-BE49-F238E27FC236}">
+                <a16:creationId xmlns:a16="http://schemas.microsoft.com/office/drawing/2014/main" id="{072D524B-01D2-EB00-7BF0-4B28BBD0D307}"/>
               </a:ext>
             </a:extLst>
           </p:cNvPr>
@@ -8217,42 +7553,6 @@
         </p:nvPicPr>
         <p:blipFill>
           <a:blip r:embed="rId2" cstate="print">
-            <a:extLst>
-              <a:ext uri="{28A0092B-C50C-407E-A947-70E740481C1C}">
-                <a14:useLocalDpi xmlns:a14="http://schemas.microsoft.com/office/drawing/2010/main" val="0"/>
-              </a:ext>
-            </a:extLst>
-          </a:blip>
-          <a:stretch>
-            <a:fillRect/>
-          </a:stretch>
-        </p:blipFill>
-        <p:spPr>
-          <a:xfrm>
-            <a:off x="-64169" y="-64168"/>
-            <a:ext cx="12304295" cy="6978316"/>
-          </a:xfrm>
-          <a:prstGeom prst="rect">
-            <a:avLst/>
-          </a:prstGeom>
-        </p:spPr>
-      </p:pic>
-      <p:pic>
-        <p:nvPicPr>
-          <p:cNvPr id="6" name="Picture 5" descr="A logo with a star and wings&#10;&#10;Description automatically generated with low confidence">
-            <a:extLst>
-              <a:ext uri="{FF2B5EF4-FFF2-40B4-BE49-F238E27FC236}">
-                <a16:creationId xmlns:a16="http://schemas.microsoft.com/office/drawing/2014/main" id="{072D524B-01D2-EB00-7BF0-4B28BBD0D307}"/>
-              </a:ext>
-            </a:extLst>
-          </p:cNvPr>
-          <p:cNvPicPr>
-            <a:picLocks noChangeAspect="1"/>
-          </p:cNvPicPr>
-          <p:nvPr/>
-        </p:nvPicPr>
-        <p:blipFill>
-          <a:blip r:embed="rId3" cstate="print">
             <a:extLst>
               <a:ext uri="{28A0092B-C50C-407E-A947-70E740481C1C}">
                 <a14:useLocalDpi xmlns:a14="http://schemas.microsoft.com/office/drawing/2010/main" val="0"/>
@@ -8552,10 +7852,10 @@
       </p:grpSpPr>
       <p:pic>
         <p:nvPicPr>
-          <p:cNvPr id="5" name="Picture 4" descr="A picture containing screenshot, darkness, space, blur">
-            <a:extLst>
-              <a:ext uri="{FF2B5EF4-FFF2-40B4-BE49-F238E27FC236}">
-                <a16:creationId xmlns:a16="http://schemas.microsoft.com/office/drawing/2014/main" id="{52739797-CC3D-257C-46A2-506293C3D466}"/>
+          <p:cNvPr id="6" name="Picture 5" descr="A logo with a star and wings&#10;&#10;Description automatically generated with low confidence">
+            <a:extLst>
+              <a:ext uri="{FF2B5EF4-FFF2-40B4-BE49-F238E27FC236}">
+                <a16:creationId xmlns:a16="http://schemas.microsoft.com/office/drawing/2014/main" id="{55ABB70F-66D0-B147-8CE2-01872C05AF13}"/>
               </a:ext>
             </a:extLst>
           </p:cNvPr>
@@ -8566,42 +7866,6 @@
         </p:nvPicPr>
         <p:blipFill>
           <a:blip r:embed="rId2" cstate="print">
-            <a:extLst>
-              <a:ext uri="{28A0092B-C50C-407E-A947-70E740481C1C}">
-                <a14:useLocalDpi xmlns:a14="http://schemas.microsoft.com/office/drawing/2010/main" val="0"/>
-              </a:ext>
-            </a:extLst>
-          </a:blip>
-          <a:stretch>
-            <a:fillRect/>
-          </a:stretch>
-        </p:blipFill>
-        <p:spPr>
-          <a:xfrm>
-            <a:off x="-64169" y="-64168"/>
-            <a:ext cx="12304295" cy="6978316"/>
-          </a:xfrm>
-          <a:prstGeom prst="rect">
-            <a:avLst/>
-          </a:prstGeom>
-        </p:spPr>
-      </p:pic>
-      <p:pic>
-        <p:nvPicPr>
-          <p:cNvPr id="6" name="Picture 5" descr="A logo with a star and wings&#10;&#10;Description automatically generated with low confidence">
-            <a:extLst>
-              <a:ext uri="{FF2B5EF4-FFF2-40B4-BE49-F238E27FC236}">
-                <a16:creationId xmlns:a16="http://schemas.microsoft.com/office/drawing/2014/main" id="{55ABB70F-66D0-B147-8CE2-01872C05AF13}"/>
-              </a:ext>
-            </a:extLst>
-          </p:cNvPr>
-          <p:cNvPicPr>
-            <a:picLocks noChangeAspect="1"/>
-          </p:cNvPicPr>
-          <p:nvPr/>
-        </p:nvPicPr>
-        <p:blipFill>
-          <a:blip r:embed="rId3" cstate="print">
             <a:extLst>
               <a:ext uri="{28A0092B-C50C-407E-A947-70E740481C1C}">
                 <a14:useLocalDpi xmlns:a14="http://schemas.microsoft.com/office/drawing/2010/main" val="0"/>
@@ -8862,7 +8126,7 @@
           <p:nvPr/>
         </p:nvPicPr>
         <p:blipFill>
-          <a:blip r:embed="rId4">
+          <a:blip r:embed="rId3">
             <a:extLst>
               <a:ext uri="{28A0092B-C50C-407E-A947-70E740481C1C}">
                 <a14:useLocalDpi xmlns:a14="http://schemas.microsoft.com/office/drawing/2010/main" val="0"/>
